--- a/docs/poster/variants/v18.pptx
+++ b/docs/poster/variants/v18.pptx
@@ -4287,6 +4287,90 @@
               </a:spcAft>
             </a:pPr>
             <a:r>
+              <a:rPr sz="6200" b="1">
+                <a:solidFill>
+                  <a:srgbClr val="B5502A"/>
+                </a:solidFill>
+                <a:latin typeface="Times New Roman"/>
+              </a:rPr>
+              <a:t>1,389</a:t>
+            </a:r>
+          </a:p>
+        </p:txBody>
+      </p:sp>
+      <p:sp>
+        <p:nvSpPr>
+          <p:cNvPr id="31" name="TextBox 30"/>
+          <p:cNvSpPr txBox="1"/>
+          <p:nvPr/>
+        </p:nvSpPr>
+        <p:spPr>
+          <a:xfrm>
+            <a:off x="731520" y="16605504"/>
+            <a:ext cx="10607040" cy="365760"/>
+          </a:xfrm>
+          <a:prstGeom prst="rect">
+            <a:avLst/>
+          </a:prstGeom>
+          <a:noFill/>
+        </p:spPr>
+        <p:txBody>
+          <a:bodyPr wrap="square" lIns="0" rIns="0" tIns="0" bIns="0">
+            <a:spAutoFit/>
+          </a:bodyPr>
+          <a:lstStyle/>
+          <a:p>
+            <a:pPr algn="l">
+              <a:lnSpc>
+                <a:spcPct val="122000"/>
+              </a:lnSpc>
+              <a:spcAft>
+                <a:spcPts val="600"/>
+              </a:spcAft>
+            </a:pPr>
+            <a:r>
+              <a:rPr sz="1600" b="0">
+                <a:solidFill>
+                  <a:srgbClr val="5B5B5B"/>
+                </a:solidFill>
+                <a:latin typeface="Arial"/>
+              </a:rPr>
+              <a:t>joystick commands through the platform</a:t>
+            </a:r>
+          </a:p>
+        </p:txBody>
+      </p:sp>
+      <p:sp>
+        <p:nvSpPr>
+          <p:cNvPr id="32" name="TextBox 31"/>
+          <p:cNvSpPr txBox="1"/>
+          <p:nvPr/>
+        </p:nvSpPr>
+        <p:spPr>
+          <a:xfrm>
+            <a:off x="731520" y="17075912"/>
+            <a:ext cx="10607040" cy="365760"/>
+          </a:xfrm>
+          <a:prstGeom prst="rect">
+            <a:avLst/>
+          </a:prstGeom>
+          <a:noFill/>
+        </p:spPr>
+        <p:txBody>
+          <a:bodyPr wrap="square" lIns="0" rIns="0" tIns="0" bIns="0">
+            <a:spAutoFit/>
+          </a:bodyPr>
+          <a:lstStyle/>
+          <a:p>
+            <a:pPr algn="l">
+              <a:lnSpc>
+                <a:spcPct val="95000"/>
+              </a:lnSpc>
+              <a:spcAft>
+                <a:spcPts val="0"/>
+              </a:spcAft>
+            </a:pPr>
+            <a:r>
               <a:rPr sz="3400" b="1">
                 <a:solidFill>
                   <a:srgbClr val="FFFFFF"/>
@@ -4300,13 +4384,13 @@
       </p:sp>
       <p:sp>
         <p:nvSpPr>
-          <p:cNvPr id="31" name="Rectangle 30"/>
+          <p:cNvPr id="33" name="Rectangle 32"/>
           <p:cNvSpPr/>
           <p:nvPr/>
         </p:nvSpPr>
         <p:spPr>
           <a:xfrm>
-            <a:off x="731520" y="16363695"/>
+            <a:off x="731520" y="17637252"/>
             <a:ext cx="10607040" cy="27432"/>
           </a:xfrm>
           <a:prstGeom prst="rect">
@@ -4344,13 +4428,13 @@
       </p:sp>
       <p:sp>
         <p:nvSpPr>
-          <p:cNvPr id="32" name="TextBox 31"/>
+          <p:cNvPr id="34" name="TextBox 33"/>
           <p:cNvSpPr txBox="1"/>
           <p:nvPr/>
         </p:nvSpPr>
         <p:spPr>
           <a:xfrm>
-            <a:off x="731520" y="16692879"/>
+            <a:off x="731520" y="17966436"/>
             <a:ext cx="10607040" cy="365760"/>
           </a:xfrm>
           <a:prstGeom prst="rect">
@@ -4386,13 +4470,13 @@
       </p:sp>
       <p:sp>
         <p:nvSpPr>
-          <p:cNvPr id="33" name="TextBox 32"/>
+          <p:cNvPr id="35" name="TextBox 34"/>
           <p:cNvSpPr txBox="1"/>
           <p:nvPr/>
         </p:nvSpPr>
         <p:spPr>
           <a:xfrm>
-            <a:off x="731520" y="18804128"/>
+            <a:off x="731520" y="20077684"/>
             <a:ext cx="10607040" cy="365760"/>
           </a:xfrm>
           <a:prstGeom prst="rect">
@@ -4428,13 +4512,13 @@
       </p:sp>
       <p:sp>
         <p:nvSpPr>
-          <p:cNvPr id="34" name="Rectangle 33"/>
+          <p:cNvPr id="36" name="Rectangle 35"/>
           <p:cNvSpPr/>
           <p:nvPr/>
         </p:nvSpPr>
         <p:spPr>
           <a:xfrm>
-            <a:off x="731520" y="19365468"/>
+            <a:off x="731520" y="20639024"/>
             <a:ext cx="10607040" cy="27432"/>
           </a:xfrm>
           <a:prstGeom prst="rect">
@@ -4472,13 +4556,13 @@
       </p:sp>
       <p:sp>
         <p:nvSpPr>
-          <p:cNvPr id="35" name="TextBox 34"/>
+          <p:cNvPr id="37" name="TextBox 36"/>
           <p:cNvSpPr txBox="1"/>
           <p:nvPr/>
         </p:nvSpPr>
         <p:spPr>
           <a:xfrm>
-            <a:off x="731520" y="19694652"/>
+            <a:off x="731520" y="20968208"/>
             <a:ext cx="10607040" cy="365760"/>
           </a:xfrm>
           <a:prstGeom prst="rect">
@@ -4514,13 +4598,13 @@
       </p:sp>
       <p:sp>
         <p:nvSpPr>
-          <p:cNvPr id="36" name="TextBox 35"/>
+          <p:cNvPr id="38" name="TextBox 37"/>
           <p:cNvSpPr txBox="1"/>
           <p:nvPr/>
         </p:nvSpPr>
         <p:spPr>
           <a:xfrm>
-            <a:off x="731520" y="21186140"/>
+            <a:off x="731520" y="22459696"/>
             <a:ext cx="10607040" cy="365760"/>
           </a:xfrm>
           <a:prstGeom prst="rect">
@@ -4543,6 +4627,90 @@
               </a:spcAft>
             </a:pPr>
             <a:r>
+              <a:rPr sz="6200" b="1">
+                <a:solidFill>
+                  <a:srgbClr val="B5502A"/>
+                </a:solidFill>
+                <a:latin typeface="Times New Roman"/>
+              </a:rPr>
+              <a:t>92</a:t>
+            </a:r>
+          </a:p>
+        </p:txBody>
+      </p:sp>
+      <p:sp>
+        <p:nvSpPr>
+          <p:cNvPr id="39" name="TextBox 38"/>
+          <p:cNvSpPr txBox="1"/>
+          <p:nvPr/>
+        </p:nvSpPr>
+        <p:spPr>
+          <a:xfrm>
+            <a:off x="731520" y="23262844"/>
+            <a:ext cx="10607040" cy="365760"/>
+          </a:xfrm>
+          <a:prstGeom prst="rect">
+            <a:avLst/>
+          </a:prstGeom>
+          <a:noFill/>
+        </p:spPr>
+        <p:txBody>
+          <a:bodyPr wrap="square" lIns="0" rIns="0" tIns="0" bIns="0">
+            <a:spAutoFit/>
+          </a:bodyPr>
+          <a:lstStyle/>
+          <a:p>
+            <a:pPr algn="l">
+              <a:lnSpc>
+                <a:spcPct val="122000"/>
+              </a:lnSpc>
+              <a:spcAft>
+                <a:spcPts val="600"/>
+              </a:spcAft>
+            </a:pPr>
+            <a:r>
+              <a:rPr sz="1600" b="0">
+                <a:solidFill>
+                  <a:srgbClr val="5B5B5B"/>
+                </a:solidFill>
+                <a:latin typeface="Arial"/>
+              </a:rPr>
+              <a:t>questions asked of a dataset so far</a:t>
+            </a:r>
+          </a:p>
+        </p:txBody>
+      </p:sp>
+      <p:sp>
+        <p:nvSpPr>
+          <p:cNvPr id="40" name="TextBox 39"/>
+          <p:cNvSpPr txBox="1"/>
+          <p:nvPr/>
+        </p:nvSpPr>
+        <p:spPr>
+          <a:xfrm>
+            <a:off x="731520" y="23733252"/>
+            <a:ext cx="10607040" cy="365760"/>
+          </a:xfrm>
+          <a:prstGeom prst="rect">
+            <a:avLst/>
+          </a:prstGeom>
+          <a:noFill/>
+        </p:spPr>
+        <p:txBody>
+          <a:bodyPr wrap="square" lIns="0" rIns="0" tIns="0" bIns="0">
+            <a:spAutoFit/>
+          </a:bodyPr>
+          <a:lstStyle/>
+          <a:p>
+            <a:pPr algn="l">
+              <a:lnSpc>
+                <a:spcPct val="95000"/>
+              </a:lnSpc>
+              <a:spcAft>
+                <a:spcPts val="0"/>
+              </a:spcAft>
+            </a:pPr>
+            <a:r>
               <a:rPr sz="3400" b="1">
                 <a:solidFill>
                   <a:srgbClr val="FFFFFF"/>
@@ -4556,13 +4724,13 @@
       </p:sp>
       <p:sp>
         <p:nvSpPr>
-          <p:cNvPr id="37" name="Rectangle 36"/>
+          <p:cNvPr id="41" name="Rectangle 40"/>
           <p:cNvSpPr/>
           <p:nvPr/>
         </p:nvSpPr>
         <p:spPr>
           <a:xfrm>
-            <a:off x="731520" y="21747480"/>
+            <a:off x="731520" y="24294592"/>
             <a:ext cx="10607040" cy="27432"/>
           </a:xfrm>
           <a:prstGeom prst="rect">
@@ -4600,13 +4768,13 @@
       </p:sp>
       <p:sp>
         <p:nvSpPr>
-          <p:cNvPr id="38" name="TextBox 37"/>
+          <p:cNvPr id="42" name="TextBox 41"/>
           <p:cNvSpPr txBox="1"/>
           <p:nvPr/>
         </p:nvSpPr>
         <p:spPr>
           <a:xfrm>
-            <a:off x="731520" y="22076664"/>
+            <a:off x="731520" y="24623776"/>
             <a:ext cx="10607040" cy="365760"/>
           </a:xfrm>
           <a:prstGeom prst="rect">
@@ -4642,13 +4810,13 @@
       </p:sp>
       <p:sp>
         <p:nvSpPr>
-          <p:cNvPr id="39" name="TextBox 38"/>
+          <p:cNvPr id="43" name="TextBox 42"/>
           <p:cNvSpPr txBox="1"/>
           <p:nvPr/>
         </p:nvSpPr>
         <p:spPr>
           <a:xfrm>
-            <a:off x="731520" y="23878032"/>
+            <a:off x="731520" y="26425144"/>
             <a:ext cx="10607040" cy="365760"/>
           </a:xfrm>
           <a:prstGeom prst="rect">
@@ -4684,13 +4852,13 @@
       </p:sp>
       <p:sp>
         <p:nvSpPr>
-          <p:cNvPr id="40" name="Rectangle 39"/>
+          <p:cNvPr id="44" name="Rectangle 43"/>
           <p:cNvSpPr/>
           <p:nvPr/>
         </p:nvSpPr>
         <p:spPr>
           <a:xfrm>
-            <a:off x="731520" y="24439372"/>
+            <a:off x="731520" y="26986484"/>
             <a:ext cx="10607040" cy="27432"/>
           </a:xfrm>
           <a:prstGeom prst="rect">
@@ -4728,13 +4896,13 @@
       </p:sp>
       <p:sp>
         <p:nvSpPr>
-          <p:cNvPr id="41" name="TextBox 40"/>
+          <p:cNvPr id="45" name="TextBox 44"/>
           <p:cNvSpPr txBox="1"/>
           <p:nvPr/>
         </p:nvSpPr>
         <p:spPr>
           <a:xfrm>
-            <a:off x="731520" y="24768556"/>
+            <a:off x="731520" y="27315668"/>
             <a:ext cx="10607040" cy="365760"/>
           </a:xfrm>
           <a:prstGeom prst="rect">
@@ -4770,14 +4938,14 @@
       </p:sp>
       <p:sp>
         <p:nvSpPr>
-          <p:cNvPr id="42" name="TextBox 41"/>
+          <p:cNvPr id="46" name="TextBox 45"/>
           <p:cNvSpPr txBox="1"/>
           <p:nvPr/>
         </p:nvSpPr>
         <p:spPr>
           <a:xfrm>
-            <a:off x="731520" y="26569924"/>
-            <a:ext cx="10607040" cy="365760"/>
+            <a:off x="11704320" y="12800583"/>
+            <a:ext cx="20482560" cy="365760"/>
           </a:xfrm>
           <a:prstGeom prst="rect">
             <a:avLst/>
@@ -4805,21 +4973,21 @@
                 </a:solidFill>
                 <a:latin typeface="Times New Roman"/>
               </a:rPr>
-              <a:t>Adding the next robot</a:t>
-            </a:r>
-          </a:p>
-        </p:txBody>
-      </p:sp>
-      <p:sp>
-        <p:nvSpPr>
-          <p:cNvPr id="43" name="Rectangle 42"/>
+              <a:t>Robots on the platform today</a:t>
+            </a:r>
+          </a:p>
+        </p:txBody>
+      </p:sp>
+      <p:sp>
+        <p:nvSpPr>
+          <p:cNvPr id="47" name="Rectangle 46"/>
           <p:cNvSpPr/>
           <p:nvPr/>
         </p:nvSpPr>
         <p:spPr>
           <a:xfrm>
-            <a:off x="731520" y="27131264"/>
-            <a:ext cx="10607040" cy="27432"/>
+            <a:off x="11704320" y="13361923"/>
+            <a:ext cx="20482560" cy="27432"/>
           </a:xfrm>
           <a:prstGeom prst="rect">
             <a:avLst/>
@@ -4856,14 +5024,14 @@
       </p:sp>
       <p:sp>
         <p:nvSpPr>
-          <p:cNvPr id="44" name="TextBox 43"/>
+          <p:cNvPr id="48" name="TextBox 47"/>
           <p:cNvSpPr txBox="1"/>
           <p:nvPr/>
         </p:nvSpPr>
         <p:spPr>
           <a:xfrm>
-            <a:off x="731520" y="27460448"/>
-            <a:ext cx="10607040" cy="365760"/>
+            <a:off x="11704320" y="13691107"/>
+            <a:ext cx="20482560" cy="365760"/>
           </a:xfrm>
           <a:prstGeom prst="rect">
             <a:avLst/>
@@ -4891,20 +5059,20 @@
                 </a:solidFill>
                 <a:latin typeface="Arial"/>
               </a:rPr>
-              <a:t>A new robot needs a project, an API key and a session start. The ingest contract is the same for every vehicle: start a session, post sensor batches and frames while driving, stop. The platform does not care what the robot is. The Unitree humanoid's project exists on this basis and is waiting on its first upload.</a:t>
-            </a:r>
-          </a:p>
-        </p:txBody>
-      </p:sp>
-      <p:sp>
-        <p:nvSpPr>
-          <p:cNvPr id="45" name="TextBox 44"/>
+              <a:t>Robot 241 is a tracked rover that drives crop rows and streams camera, GPS and two IMUs. The laser cart carries the weeder: a galvanometer laser, a down camera over the work zone and a forward camera. Ten projects sit on the platform and two of them have a robot reporting into them. Between those two vehicles, 2,686 frames in 26 drives.</a:t>
+            </a:r>
+          </a:p>
+        </p:txBody>
+      </p:sp>
+      <p:sp>
+        <p:nvSpPr>
+          <p:cNvPr id="49" name="TextBox 48"/>
           <p:cNvSpPr txBox="1"/>
           <p:nvPr/>
         </p:nvSpPr>
         <p:spPr>
           <a:xfrm>
-            <a:off x="11704320" y="12800583"/>
+            <a:off x="11704320" y="15182596"/>
             <a:ext cx="20482560" cy="365760"/>
           </a:xfrm>
           <a:prstGeom prst="rect">
@@ -4927,26 +5095,110 @@
               </a:spcAft>
             </a:pPr>
             <a:r>
-              <a:rPr sz="3400" b="1">
-                <a:solidFill>
-                  <a:srgbClr val="FFFFFF"/>
+              <a:rPr sz="6200" b="1">
+                <a:solidFill>
+                  <a:srgbClr val="B5502A"/>
                 </a:solidFill>
                 <a:latin typeface="Times New Roman"/>
               </a:rPr>
-              <a:t>Robots on the platform today</a:t>
-            </a:r>
-          </a:p>
-        </p:txBody>
-      </p:sp>
-      <p:sp>
-        <p:nvSpPr>
-          <p:cNvPr id="46" name="Rectangle 45"/>
+              <a:t>14</a:t>
+            </a:r>
+          </a:p>
+        </p:txBody>
+      </p:sp>
+      <p:sp>
+        <p:nvSpPr>
+          <p:cNvPr id="50" name="TextBox 49"/>
+          <p:cNvSpPr txBox="1"/>
+          <p:nvPr/>
+        </p:nvSpPr>
+        <p:spPr>
+          <a:xfrm>
+            <a:off x="11704320" y="15985744"/>
+            <a:ext cx="20482560" cy="365760"/>
+          </a:xfrm>
+          <a:prstGeom prst="rect">
+            <a:avLst/>
+          </a:prstGeom>
+          <a:noFill/>
+        </p:spPr>
+        <p:txBody>
+          <a:bodyPr wrap="square" lIns="0" rIns="0" tIns="0" bIns="0">
+            <a:spAutoFit/>
+          </a:bodyPr>
+          <a:lstStyle/>
+          <a:p>
+            <a:pPr algn="l">
+              <a:lnSpc>
+                <a:spcPct val="122000"/>
+              </a:lnSpc>
+              <a:spcAft>
+                <a:spcPts val="600"/>
+              </a:spcAft>
+            </a:pPr>
+            <a:r>
+              <a:rPr sz="1600" b="0">
+                <a:solidFill>
+                  <a:srgbClr val="5B5B5B"/>
+                </a:solidFill>
+                <a:latin typeface="Arial"/>
+              </a:rPr>
+              <a:t>analysis tools the planner can choose from</a:t>
+            </a:r>
+          </a:p>
+        </p:txBody>
+      </p:sp>
+      <p:sp>
+        <p:nvSpPr>
+          <p:cNvPr id="51" name="TextBox 50"/>
+          <p:cNvSpPr txBox="1"/>
+          <p:nvPr/>
+        </p:nvSpPr>
+        <p:spPr>
+          <a:xfrm>
+            <a:off x="11704320" y="16456152"/>
+            <a:ext cx="20482560" cy="365760"/>
+          </a:xfrm>
+          <a:prstGeom prst="rect">
+            <a:avLst/>
+          </a:prstGeom>
+          <a:noFill/>
+        </p:spPr>
+        <p:txBody>
+          <a:bodyPr wrap="square" lIns="0" rIns="0" tIns="0" bIns="0">
+            <a:spAutoFit/>
+          </a:bodyPr>
+          <a:lstStyle/>
+          <a:p>
+            <a:pPr algn="l">
+              <a:lnSpc>
+                <a:spcPct val="95000"/>
+              </a:lnSpc>
+              <a:spcAft>
+                <a:spcPts val="0"/>
+              </a:spcAft>
+            </a:pPr>
+            <a:r>
+              <a:rPr sz="3400" b="1">
+                <a:solidFill>
+                  <a:srgbClr val="FFFFFF"/>
+                </a:solidFill>
+                <a:latin typeface="Times New Roman"/>
+              </a:rPr>
+              <a:t>Ask a dataset what it is good for</a:t>
+            </a:r>
+          </a:p>
+        </p:txBody>
+      </p:sp>
+      <p:sp>
+        <p:nvSpPr>
+          <p:cNvPr id="52" name="Rectangle 51"/>
           <p:cNvSpPr/>
           <p:nvPr/>
         </p:nvSpPr>
         <p:spPr>
           <a:xfrm>
-            <a:off x="11704320" y="13361923"/>
+            <a:off x="11704320" y="17017492"/>
             <a:ext cx="20482560" cy="27432"/>
           </a:xfrm>
           <a:prstGeom prst="rect">
@@ -4984,13 +5236,13 @@
       </p:sp>
       <p:sp>
         <p:nvSpPr>
-          <p:cNvPr id="47" name="TextBox 46"/>
+          <p:cNvPr id="53" name="TextBox 52"/>
           <p:cNvSpPr txBox="1"/>
           <p:nvPr/>
         </p:nvSpPr>
         <p:spPr>
           <a:xfrm>
-            <a:off x="11704320" y="13691107"/>
+            <a:off x="11704320" y="17346676"/>
             <a:ext cx="20482560" cy="365760"/>
           </a:xfrm>
           <a:prstGeom prst="rect">
@@ -5019,20 +5271,20 @@
                 </a:solidFill>
                 <a:latin typeface="Arial"/>
               </a:rPr>
-              <a:t>Robot 241 is a tracked rover that drives crop rows and streams camera, GPS and two IMUs. The laser cart carries the weeder: a galvanometer laser, a down camera over the work zone and a forward camera. A Unitree humanoid has a project and has uploaded nothing yet. Between them the two ground vehicles have recorded 2,686 frames in 26 drives.</a:t>
-            </a:r>
-          </a:p>
-        </p:txBody>
-      </p:sp>
-      <p:sp>
-        <p:nvSpPr>
-          <p:cNvPr id="48" name="TextBox 47"/>
+              <a:t>Every dataset page carries a chat box. A user types or speaks a plain question about that dataset. A planner reads the question and the dataset's real column profile, then picks from 14 fixed analysis tools or writes new code. The answer comes back with the chart and the code that produced it.</a:t>
+            </a:r>
+          </a:p>
+        </p:txBody>
+      </p:sp>
+      <p:sp>
+        <p:nvSpPr>
+          <p:cNvPr id="54" name="TextBox 53"/>
           <p:cNvSpPr txBox="1"/>
           <p:nvPr/>
         </p:nvSpPr>
         <p:spPr>
           <a:xfrm>
-            <a:off x="11704320" y="15182596"/>
+            <a:off x="11704320" y="18528284"/>
             <a:ext cx="20482560" cy="365760"/>
           </a:xfrm>
           <a:prstGeom prst="rect">
@@ -5061,20 +5313,20 @@
                 </a:solidFill>
                 <a:latin typeface="Times New Roman"/>
               </a:rPr>
-              <a:t>Ask a dataset what it is good for</a:t>
-            </a:r>
-          </a:p>
-        </p:txBody>
-      </p:sp>
-      <p:sp>
-        <p:nvSpPr>
-          <p:cNvPr id="49" name="Rectangle 48"/>
+              <a:t>Left alone for fifteen rounds</a:t>
+            </a:r>
+          </a:p>
+        </p:txBody>
+      </p:sp>
+      <p:sp>
+        <p:nvSpPr>
+          <p:cNvPr id="55" name="Rectangle 54"/>
           <p:cNvSpPr/>
           <p:nvPr/>
         </p:nvSpPr>
         <p:spPr>
           <a:xfrm>
-            <a:off x="11704320" y="15743935"/>
+            <a:off x="11704320" y="19089624"/>
             <a:ext cx="20482560" cy="27432"/>
           </a:xfrm>
           <a:prstGeom prst="rect">
@@ -5110,15 +5362,81 @@
           </a:p>
         </p:txBody>
       </p:sp>
-      <p:sp>
-        <p:nvSpPr>
-          <p:cNvPr id="50" name="TextBox 49"/>
+      <p:pic>
+        <p:nvPicPr>
+          <p:cNvPr id="56" name="Picture 55" descr="f_rounds.png"/>
+          <p:cNvPicPr>
+            <a:picLocks noChangeAspect="1"/>
+          </p:cNvPicPr>
+          <p:nvPr/>
+        </p:nvPicPr>
+        <p:blipFill>
+          <a:blip r:embed="rId3"/>
+          <a:stretch>
+            <a:fillRect/>
+          </a:stretch>
+        </p:blipFill>
+        <p:spPr>
+          <a:xfrm>
+            <a:off x="11704320" y="19418808"/>
+            <a:ext cx="20482560" cy="4663440"/>
+          </a:xfrm>
+          <a:prstGeom prst="rect">
+            <a:avLst/>
+          </a:prstGeom>
+        </p:spPr>
+      </p:pic>
+      <p:sp>
+        <p:nvSpPr>
+          <p:cNvPr id="57" name="TextBox 56"/>
           <p:cNvSpPr txBox="1"/>
           <p:nvPr/>
         </p:nvSpPr>
         <p:spPr>
           <a:xfrm>
-            <a:off x="11704320" y="16073119"/>
+            <a:off x="11704320" y="24191976"/>
+            <a:ext cx="20482560" cy="365760"/>
+          </a:xfrm>
+          <a:prstGeom prst="rect">
+            <a:avLst/>
+          </a:prstGeom>
+          <a:noFill/>
+        </p:spPr>
+        <p:txBody>
+          <a:bodyPr wrap="square" lIns="0" rIns="0" tIns="0" bIns="0">
+            <a:spAutoFit/>
+          </a:bodyPr>
+          <a:lstStyle/>
+          <a:p>
+            <a:pPr algn="l">
+              <a:lnSpc>
+                <a:spcPct val="118000"/>
+              </a:lnSpc>
+              <a:spcAft>
+                <a:spcPts val="0"/>
+              </a:spcAft>
+            </a:pPr>
+            <a:r>
+              <a:rPr sz="1600" b="0">
+                <a:solidFill>
+                  <a:srgbClr val="5B5B5B"/>
+                </a:solidFill>
+                <a:latin typeface="Arial"/>
+              </a:rPr>
+              <a:t>Figure 3.  (f) Fifteen unattended rounds on a fixed holdout. (g) Round 15's exact dataset, three ways. The first two marks differ only in the starting weights, so their gap is the warm-start chain; the third is the recipe the campaign ran, whose wall-clock cap truncates the cosine, with its three seeds drawn behind it. Sigma throughout is that recipe's own seed spread, 0.0040 over three seeds, propagated to the difference being quoted. Completing the schedule is not the fix -- the second mark sits below the third.</a:t>
+            </a:r>
+          </a:p>
+        </p:txBody>
+      </p:sp>
+      <p:sp>
+        <p:nvSpPr>
+          <p:cNvPr id="58" name="TextBox 57"/>
+          <p:cNvSpPr txBox="1"/>
+          <p:nvPr/>
+        </p:nvSpPr>
+        <p:spPr>
+          <a:xfrm>
+            <a:off x="11704320" y="25222200"/>
             <a:ext cx="20482560" cy="365760"/>
           </a:xfrm>
           <a:prstGeom prst="rect">
@@ -5147,21 +5465,21 @@
                 </a:solidFill>
                 <a:latin typeface="Arial"/>
               </a:rPr>
-              <a:t>Every dataset page carries a chat box. A user types or speaks a plain question about that dataset. A planner reads the question and the dataset's real column profile, then picks from 14 fixed analysis tools or writes new code. The answer comes back with the chart and the code that produced it.</a:t>
-            </a:r>
-          </a:p>
-        </p:txBody>
-      </p:sp>
-      <p:sp>
-        <p:nvSpPr>
-          <p:cNvPr id="51" name="TextBox 50"/>
+              <a:t>Two cluster jobs, one collecting and one training, ran fifteen rounds against the locked registry with nobody in the room. Each round searched public sources, filtered what it found, merged, trained and evaluated. Every round reported success. Accuracy fell for fifteen rounds. This part is built and is switched off today.</a:t>
+            </a:r>
+          </a:p>
+        </p:txBody>
+      </p:sp>
+      <p:sp>
+        <p:nvSpPr>
+          <p:cNvPr id="59" name="TextBox 58"/>
           <p:cNvSpPr txBox="1"/>
           <p:nvPr/>
         </p:nvSpPr>
         <p:spPr>
           <a:xfrm>
-            <a:off x="11704320" y="17254728"/>
-            <a:ext cx="20482560" cy="365760"/>
+            <a:off x="32552640" y="12800583"/>
+            <a:ext cx="10607040" cy="365760"/>
           </a:xfrm>
           <a:prstGeom prst="rect">
             <a:avLst/>
@@ -5189,21 +5507,21 @@
                 </a:solidFill>
                 <a:latin typeface="Times New Roman"/>
               </a:rPr>
-              <a:t>Left alone for fifteen rounds</a:t>
-            </a:r>
-          </a:p>
-        </p:txBody>
-      </p:sp>
-      <p:sp>
-        <p:nvSpPr>
-          <p:cNvPr id="52" name="Rectangle 51"/>
+              <a:t>A drive becomes a dataset as it opens</a:t>
+            </a:r>
+          </a:p>
+        </p:txBody>
+      </p:sp>
+      <p:sp>
+        <p:nvSpPr>
+          <p:cNvPr id="60" name="Rectangle 59"/>
           <p:cNvSpPr/>
           <p:nvPr/>
         </p:nvSpPr>
         <p:spPr>
           <a:xfrm>
-            <a:off x="11704320" y="17816068"/>
-            <a:ext cx="20482560" cy="27432"/>
+            <a:off x="32552640" y="13361923"/>
+            <a:ext cx="10607040" cy="27432"/>
           </a:xfrm>
           <a:prstGeom prst="rect">
             <a:avLst/>
@@ -5238,82 +5556,16 @@
           </a:p>
         </p:txBody>
       </p:sp>
-      <p:pic>
-        <p:nvPicPr>
-          <p:cNvPr id="53" name="Picture 52" descr="f_rounds.png"/>
-          <p:cNvPicPr>
-            <a:picLocks noChangeAspect="1"/>
-          </p:cNvPicPr>
-          <p:nvPr/>
-        </p:nvPicPr>
-        <p:blipFill>
-          <a:blip r:embed="rId3"/>
-          <a:stretch>
-            <a:fillRect/>
-          </a:stretch>
-        </p:blipFill>
-        <p:spPr>
-          <a:xfrm>
-            <a:off x="11704320" y="18145252"/>
-            <a:ext cx="20482560" cy="4663440"/>
-          </a:xfrm>
-          <a:prstGeom prst="rect">
-            <a:avLst/>
-          </a:prstGeom>
-        </p:spPr>
-      </p:pic>
-      <p:sp>
-        <p:nvSpPr>
-          <p:cNvPr id="54" name="TextBox 53"/>
+      <p:sp>
+        <p:nvSpPr>
+          <p:cNvPr id="61" name="TextBox 60"/>
           <p:cNvSpPr txBox="1"/>
           <p:nvPr/>
         </p:nvSpPr>
         <p:spPr>
           <a:xfrm>
-            <a:off x="11704320" y="22918420"/>
-            <a:ext cx="20482560" cy="365760"/>
-          </a:xfrm>
-          <a:prstGeom prst="rect">
-            <a:avLst/>
-          </a:prstGeom>
-          <a:noFill/>
-        </p:spPr>
-        <p:txBody>
-          <a:bodyPr wrap="square" lIns="0" rIns="0" tIns="0" bIns="0">
-            <a:spAutoFit/>
-          </a:bodyPr>
-          <a:lstStyle/>
-          <a:p>
-            <a:pPr algn="l">
-              <a:lnSpc>
-                <a:spcPct val="118000"/>
-              </a:lnSpc>
-              <a:spcAft>
-                <a:spcPts val="0"/>
-              </a:spcAft>
-            </a:pPr>
-            <a:r>
-              <a:rPr sz="1600" b="0">
-                <a:solidFill>
-                  <a:srgbClr val="5B5B5B"/>
-                </a:solidFill>
-                <a:latin typeface="Arial"/>
-              </a:rPr>
-              <a:t>Figure 3.  (f) Fifteen unattended rounds on a fixed holdout. (g) Round 15's exact dataset, three ways. The first two marks differ only in the starting weights, so their gap is the warm-start chain; the third is the recipe the campaign ran, whose wall-clock cap truncates the cosine, with its three seeds drawn behind it. Sigma throughout is that recipe's own seed spread, 0.0040 over three seeds, propagated to the difference being quoted. Completing the schedule is not the fix -- the second mark sits below the third.</a:t>
-            </a:r>
-          </a:p>
-        </p:txBody>
-      </p:sp>
-      <p:sp>
-        <p:nvSpPr>
-          <p:cNvPr id="55" name="TextBox 54"/>
-          <p:cNvSpPr txBox="1"/>
-          <p:nvPr/>
-        </p:nvSpPr>
-        <p:spPr>
-          <a:xfrm>
-            <a:off x="11704320" y="23948644"/>
-            <a:ext cx="20482560" cy="365760"/>
+            <a:off x="32552640" y="13691107"/>
+            <a:ext cx="10607040" cy="365760"/>
           </a:xfrm>
           <a:prstGeom prst="rect">
             <a:avLst/>
@@ -5341,20 +5593,20 @@
                 </a:solidFill>
                 <a:latin typeface="Arial"/>
               </a:rPr>
-              <a:t>Two cluster jobs, one collecting and one training, ran fifteen rounds against the locked registry with nobody in the room. Each round searched public sources, filtered what it found, merged, trained and evaluated. Every round reported success. Accuracy fell for fifteen rounds. This part is built and is switched off today.</a:t>
-            </a:r>
-          </a:p>
-        </p:txBody>
-      </p:sp>
-      <p:sp>
-        <p:nvSpPr>
-          <p:cNvPr id="56" name="TextBox 55"/>
+              <a:t>A vehicle opens a session and the platform registers it as a governed dataset at that moment, not after the drive ends. Frames and sensor batches arrive over one API key. Robot 241 sends camera, GPS and two IMUs; the laser cart sends camera, laser state, vehicle telemetry and its own detections, and no position at all.</a:t>
+            </a:r>
+          </a:p>
+        </p:txBody>
+      </p:sp>
+      <p:sp>
+        <p:nvSpPr>
+          <p:cNvPr id="62" name="TextBox 61"/>
           <p:cNvSpPr txBox="1"/>
           <p:nvPr/>
         </p:nvSpPr>
         <p:spPr>
           <a:xfrm>
-            <a:off x="32552640" y="12800583"/>
+            <a:off x="32552640" y="15492476"/>
             <a:ext cx="10607040" cy="365760"/>
           </a:xfrm>
           <a:prstGeom prst="rect">
@@ -5383,20 +5635,20 @@
                 </a:solidFill>
                 <a:latin typeface="Times New Roman"/>
               </a:rPr>
-              <a:t>A drive becomes a dataset as it opens</a:t>
-            </a:r>
-          </a:p>
-        </p:txBody>
-      </p:sp>
-      <p:sp>
-        <p:nvSpPr>
-          <p:cNvPr id="57" name="Rectangle 56"/>
+              <a:t>Four frames, as recorded</a:t>
+            </a:r>
+          </a:p>
+        </p:txBody>
+      </p:sp>
+      <p:sp>
+        <p:nvSpPr>
+          <p:cNvPr id="63" name="Rectangle 62"/>
           <p:cNvSpPr/>
           <p:nvPr/>
         </p:nvSpPr>
         <p:spPr>
           <a:xfrm>
-            <a:off x="32552640" y="13361923"/>
+            <a:off x="32552640" y="16053815"/>
             <a:ext cx="10607040" cy="27432"/>
           </a:xfrm>
           <a:prstGeom prst="rect">
@@ -5432,15 +5684,81 @@
           </a:p>
         </p:txBody>
       </p:sp>
-      <p:sp>
-        <p:nvSpPr>
-          <p:cNvPr id="58" name="TextBox 57"/>
+      <p:pic>
+        <p:nvPicPr>
+          <p:cNvPr id="64" name="Picture 63" descr="l_robots.png"/>
+          <p:cNvPicPr>
+            <a:picLocks noChangeAspect="1"/>
+          </p:cNvPicPr>
+          <p:nvPr/>
+        </p:nvPicPr>
+        <p:blipFill>
+          <a:blip r:embed="rId4"/>
+          <a:stretch>
+            <a:fillRect/>
+          </a:stretch>
+        </p:blipFill>
+        <p:spPr>
+          <a:xfrm>
+            <a:off x="32552640" y="16382999"/>
+            <a:ext cx="10607040" cy="2377440"/>
+          </a:xfrm>
+          <a:prstGeom prst="rect">
+            <a:avLst/>
+          </a:prstGeom>
+        </p:spPr>
+      </p:pic>
+      <p:sp>
+        <p:nvSpPr>
+          <p:cNvPr id="65" name="TextBox 64"/>
           <p:cNvSpPr txBox="1"/>
           <p:nvPr/>
         </p:nvSpPr>
         <p:spPr>
           <a:xfrm>
-            <a:off x="32552640" y="13691107"/>
+            <a:off x="32552640" y="18870168"/>
+            <a:ext cx="10607040" cy="365760"/>
+          </a:xfrm>
+          <a:prstGeom prst="rect">
+            <a:avLst/>
+          </a:prstGeom>
+          <a:noFill/>
+        </p:spPr>
+        <p:txBody>
+          <a:bodyPr wrap="square" lIns="0" rIns="0" tIns="0" bIns="0">
+            <a:spAutoFit/>
+          </a:bodyPr>
+          <a:lstStyle/>
+          <a:p>
+            <a:pPr algn="l">
+              <a:lnSpc>
+                <a:spcPct val="118000"/>
+              </a:lnSpc>
+              <a:spcAft>
+                <a:spcPts val="0"/>
+              </a:spcAft>
+            </a:pPr>
+            <a:r>
+              <a:rPr sz="1600" b="0">
+                <a:solidFill>
+                  <a:srgbClr val="5B5B5B"/>
+                </a:solidFill>
+                <a:latin typeface="Arial"/>
+              </a:rPr>
+              <a:t>Figure 4.  Frames as recorded, unenhanced. Robot 241 has sent 2,238 frames at 640 x 360 and 1 Hz, the laser cart 427, and 75 of the cart's were taken in a field. None of the 2,686 is labelled. The rectangle in the down camera is the cart's fixed work-zone overlay. It is drawn on every frame, including the ones with no vegetation in them.</a:t>
+            </a:r>
+          </a:p>
+        </p:txBody>
+      </p:sp>
+      <p:sp>
+        <p:nvSpPr>
+          <p:cNvPr id="66" name="TextBox 65"/>
+          <p:cNvSpPr txBox="1"/>
+          <p:nvPr/>
+        </p:nvSpPr>
+        <p:spPr>
+          <a:xfrm>
+            <a:off x="32552640" y="20140168"/>
             <a:ext cx="10607040" cy="365760"/>
           </a:xfrm>
           <a:prstGeom prst="rect">
@@ -5469,20 +5787,20 @@
                 </a:solidFill>
                 <a:latin typeface="Arial"/>
               </a:rPr>
-              <a:t>A vehicle opens a session and the platform registers it as a governed dataset at that moment, not after the drive ends. Frames and sensor batches arrive over one API key. Robot 241 sends camera, GPS and two IMUs; the laser cart sends camera, laser state, vehicle telemetry and its own detections, and no position at all.</a:t>
-            </a:r>
-          </a:p>
-        </p:txBody>
-      </p:sp>
-      <p:sp>
-        <p:nvSpPr>
-          <p:cNvPr id="59" name="TextBox 58"/>
+              <a:t>Nothing here is enhanced and nothing is labelled. The rectangle in the cart's down camera is a fixed work-zone overlay: it sits at the same pixels on frames with no vegetation in them at all.</a:t>
+            </a:r>
+          </a:p>
+        </p:txBody>
+      </p:sp>
+      <p:sp>
+        <p:nvSpPr>
+          <p:cNvPr id="67" name="TextBox 66"/>
           <p:cNvSpPr txBox="1"/>
           <p:nvPr/>
         </p:nvSpPr>
         <p:spPr>
           <a:xfrm>
-            <a:off x="32552640" y="15492476"/>
+            <a:off x="32552640" y="21631656"/>
             <a:ext cx="10607040" cy="365760"/>
           </a:xfrm>
           <a:prstGeom prst="rect">
@@ -5511,20 +5829,20 @@
                 </a:solidFill>
                 <a:latin typeface="Times New Roman"/>
               </a:rPr>
-              <a:t>Four frames, as recorded</a:t>
-            </a:r>
-          </a:p>
-        </p:txBody>
-      </p:sp>
-      <p:sp>
-        <p:nvSpPr>
-          <p:cNvPr id="60" name="Rectangle 59"/>
+              <a:t>Only one robot has the button</a:t>
+            </a:r>
+          </a:p>
+        </p:txBody>
+      </p:sp>
+      <p:sp>
+        <p:nvSpPr>
+          <p:cNvPr id="68" name="Rectangle 67"/>
           <p:cNvSpPr/>
           <p:nvPr/>
         </p:nvSpPr>
         <p:spPr>
           <a:xfrm>
-            <a:off x="32552640" y="16053815"/>
+            <a:off x="32552640" y="22192996"/>
             <a:ext cx="10607040" cy="27432"/>
           </a:xfrm>
           <a:prstGeom prst="rect">
@@ -5560,81 +5878,15 @@
           </a:p>
         </p:txBody>
       </p:sp>
-      <p:pic>
-        <p:nvPicPr>
-          <p:cNvPr id="61" name="Picture 60" descr="l_robots.png"/>
-          <p:cNvPicPr>
-            <a:picLocks noChangeAspect="1"/>
-          </p:cNvPicPr>
-          <p:nvPr/>
-        </p:nvPicPr>
-        <p:blipFill>
-          <a:blip r:embed="rId4"/>
-          <a:stretch>
-            <a:fillRect/>
-          </a:stretch>
-        </p:blipFill>
-        <p:spPr>
-          <a:xfrm>
-            <a:off x="32552640" y="16382999"/>
-            <a:ext cx="10607040" cy="2377440"/>
-          </a:xfrm>
-          <a:prstGeom prst="rect">
-            <a:avLst/>
-          </a:prstGeom>
-        </p:spPr>
-      </p:pic>
-      <p:sp>
-        <p:nvSpPr>
-          <p:cNvPr id="62" name="TextBox 61"/>
+      <p:sp>
+        <p:nvSpPr>
+          <p:cNvPr id="69" name="TextBox 68"/>
           <p:cNvSpPr txBox="1"/>
           <p:nvPr/>
         </p:nvSpPr>
         <p:spPr>
           <a:xfrm>
-            <a:off x="32552640" y="18870168"/>
-            <a:ext cx="10607040" cy="365760"/>
-          </a:xfrm>
-          <a:prstGeom prst="rect">
-            <a:avLst/>
-          </a:prstGeom>
-          <a:noFill/>
-        </p:spPr>
-        <p:txBody>
-          <a:bodyPr wrap="square" lIns="0" rIns="0" tIns="0" bIns="0">
-            <a:spAutoFit/>
-          </a:bodyPr>
-          <a:lstStyle/>
-          <a:p>
-            <a:pPr algn="l">
-              <a:lnSpc>
-                <a:spcPct val="118000"/>
-              </a:lnSpc>
-              <a:spcAft>
-                <a:spcPts val="0"/>
-              </a:spcAft>
-            </a:pPr>
-            <a:r>
-              <a:rPr sz="1600" b="0">
-                <a:solidFill>
-                  <a:srgbClr val="5B5B5B"/>
-                </a:solidFill>
-                <a:latin typeface="Arial"/>
-              </a:rPr>
-              <a:t>Figure 4.  Frames as recorded, unenhanced. Robot 241 has sent 2,238 frames at 640 x 360 and 1 Hz, the laser cart 427, and 75 of the cart's were taken in a field. None of the 2,686 is labelled. The rectangle in the down camera is the cart's fixed work-zone overlay. It is drawn on every frame, including the ones with no vegetation in them.</a:t>
-            </a:r>
-          </a:p>
-        </p:txBody>
-      </p:sp>
-      <p:sp>
-        <p:nvSpPr>
-          <p:cNvPr id="63" name="TextBox 62"/>
-          <p:cNvSpPr txBox="1"/>
-          <p:nvPr/>
-        </p:nvSpPr>
-        <p:spPr>
-          <a:xfrm>
-            <a:off x="32552640" y="20140168"/>
+            <a:off x="32552640" y="22522180"/>
             <a:ext cx="10607040" cy="365760"/>
           </a:xfrm>
           <a:prstGeom prst="rect">
@@ -5663,20 +5915,20 @@
                 </a:solidFill>
                 <a:latin typeface="Arial"/>
               </a:rPr>
-              <a:t>Nothing here is enhanced and nothing is labelled. The rectangle in the cart's down camera is a fixed work-zone overlay: it sits at the same pixels on frames with no vegetation in them at all.</a:t>
-            </a:r>
-          </a:p>
-        </p:txBody>
-      </p:sp>
-      <p:sp>
-        <p:nvSpPr>
-          <p:cNvPr id="64" name="TextBox 63"/>
+              <a:t>The Drive button appears on the 241 project and not on the laser cart's, because the allow-list holds one target. The rover has been dark since 2026-08-28: the platform answers a drive request today with its own offline page. The cart has never been drivable from the platform.</a:t>
+            </a:r>
+          </a:p>
+        </p:txBody>
+      </p:sp>
+      <p:sp>
+        <p:nvSpPr>
+          <p:cNvPr id="70" name="TextBox 69"/>
           <p:cNvSpPr txBox="1"/>
           <p:nvPr/>
         </p:nvSpPr>
         <p:spPr>
           <a:xfrm>
-            <a:off x="32552640" y="21631656"/>
+            <a:off x="32552640" y="24323548"/>
             <a:ext cx="10607040" cy="365760"/>
           </a:xfrm>
           <a:prstGeom prst="rect">
@@ -5705,20 +5957,20 @@
                 </a:solidFill>
                 <a:latin typeface="Times New Roman"/>
               </a:rPr>
-              <a:t>Only one robot has the button</a:t>
-            </a:r>
-          </a:p>
-        </p:txBody>
-      </p:sp>
-      <p:sp>
-        <p:nvSpPr>
-          <p:cNvPr id="65" name="Rectangle 64"/>
+              <a:t>Which decisions a model makes</a:t>
+            </a:r>
+          </a:p>
+        </p:txBody>
+      </p:sp>
+      <p:sp>
+        <p:nvSpPr>
+          <p:cNvPr id="71" name="Rectangle 70"/>
           <p:cNvSpPr/>
           <p:nvPr/>
         </p:nvSpPr>
         <p:spPr>
           <a:xfrm>
-            <a:off x="32552640" y="22192996"/>
+            <a:off x="32552640" y="24884888"/>
             <a:ext cx="10607040" cy="27432"/>
           </a:xfrm>
           <a:prstGeom prst="rect">
@@ -5756,13 +6008,13 @@
       </p:sp>
       <p:sp>
         <p:nvSpPr>
-          <p:cNvPr id="66" name="TextBox 65"/>
+          <p:cNvPr id="72" name="TextBox 71"/>
           <p:cNvSpPr txBox="1"/>
           <p:nvPr/>
         </p:nvSpPr>
         <p:spPr>
           <a:xfrm>
-            <a:off x="32552640" y="22522180"/>
+            <a:off x="32552640" y="25214072"/>
             <a:ext cx="10607040" cy="365760"/>
           </a:xfrm>
           <a:prstGeom prst="rect">
@@ -5791,20 +6043,20 @@
                 </a:solidFill>
                 <a:latin typeface="Arial"/>
               </a:rPr>
-              <a:t>The Drive button appears on the 241 project and not on the laser cart's, because the allow-list holds one target. The rover has been dark since 2026-08-28: the platform answers a drive request today with its own offline page. The cart has never been drivable from the platform.</a:t>
-            </a:r>
-          </a:p>
-        </p:txBody>
-      </p:sp>
-      <p:sp>
-        <p:nvSpPr>
-          <p:cNvPr id="67" name="TextBox 66"/>
+              <a:t>A language model decides what the collector goes after next, judges whether a candidate dataset is on topic, and reviews a finished step. Those run on the cluster, as batch jobs, on open weights. The lab box hosts only the small guide model, and a verdict produced there is marked in its own record as a draft that may not be reported.</a:t>
+            </a:r>
+          </a:p>
+        </p:txBody>
+      </p:sp>
+      <p:sp>
+        <p:nvSpPr>
+          <p:cNvPr id="73" name="TextBox 72"/>
           <p:cNvSpPr txBox="1"/>
           <p:nvPr/>
         </p:nvSpPr>
         <p:spPr>
           <a:xfrm>
-            <a:off x="32552640" y="24323548"/>
+            <a:off x="32552640" y="27325320"/>
             <a:ext cx="10607040" cy="365760"/>
           </a:xfrm>
           <a:prstGeom prst="rect">
@@ -5833,20 +6085,20 @@
                 </a:solidFill>
                 <a:latin typeface="Times New Roman"/>
               </a:rPr>
-              <a:t>Which decisions a model makes</a:t>
-            </a:r>
-          </a:p>
-        </p:txBody>
-      </p:sp>
-      <p:sp>
-        <p:nvSpPr>
-          <p:cNvPr id="68" name="Rectangle 67"/>
+              <a:t>Any research field is a project</a:t>
+            </a:r>
+          </a:p>
+        </p:txBody>
+      </p:sp>
+      <p:sp>
+        <p:nvSpPr>
+          <p:cNvPr id="74" name="Rectangle 73"/>
           <p:cNvSpPr/>
           <p:nvPr/>
         </p:nvSpPr>
         <p:spPr>
           <a:xfrm>
-            <a:off x="32552640" y="24884888"/>
+            <a:off x="32552640" y="27886660"/>
             <a:ext cx="10607040" cy="27432"/>
           </a:xfrm>
           <a:prstGeom prst="rect">
@@ -5884,13 +6136,13 @@
       </p:sp>
       <p:sp>
         <p:nvSpPr>
-          <p:cNvPr id="69" name="TextBox 68"/>
+          <p:cNvPr id="75" name="TextBox 74"/>
           <p:cNvSpPr txBox="1"/>
           <p:nvPr/>
         </p:nvSpPr>
         <p:spPr>
           <a:xfrm>
-            <a:off x="32552640" y="25214072"/>
+            <a:off x="32552640" y="28215844"/>
             <a:ext cx="10607040" cy="365760"/>
           </a:xfrm>
           <a:prstGeom prst="rect">
@@ -5919,69 +6171,27 @@
                 </a:solidFill>
                 <a:latin typeface="Arial"/>
               </a:rPr>
-              <a:t>A language model decides what the collector goes after next, judges whether a candidate dataset is on topic, and reviews a finished step. Those run on the cluster, as batch jobs, on open weights. The lab box hosts only the small guide model, and a verdict produced there is marked in its own record as a draft that may not be reported.</a:t>
-            </a:r>
-          </a:p>
-        </p:txBody>
-      </p:sp>
-      <p:sp>
-        <p:nvSpPr>
-          <p:cNvPr id="70" name="TextBox 69"/>
-          <p:cNvSpPr txBox="1"/>
-          <p:nvPr/>
-        </p:nvSpPr>
-        <p:spPr>
-          <a:xfrm>
-            <a:off x="32552640" y="27325320"/>
-            <a:ext cx="10607040" cy="365760"/>
-          </a:xfrm>
-          <a:prstGeom prst="rect">
-            <a:avLst/>
-          </a:prstGeom>
-          <a:noFill/>
-        </p:spPr>
-        <p:txBody>
-          <a:bodyPr wrap="square" lIns="0" rIns="0" tIns="0" bIns="0">
-            <a:spAutoFit/>
-          </a:bodyPr>
-          <a:lstStyle/>
-          <a:p>
-            <a:pPr algn="l">
-              <a:lnSpc>
-                <a:spcPct val="95000"/>
-              </a:lnSpc>
-              <a:spcAft>
-                <a:spcPts val="0"/>
-              </a:spcAft>
-            </a:pPr>
-            <a:r>
-              <a:rPr sz="3400" b="1">
-                <a:solidFill>
-                  <a:srgbClr val="FFFFFF"/>
-                </a:solidFill>
-                <a:latin typeface="Times New Roman"/>
-              </a:rPr>
-              <a:t>Any research field is a project</a:t>
-            </a:r>
-          </a:p>
-        </p:txBody>
-      </p:sp>
-      <p:sp>
-        <p:nvSpPr>
-          <p:cNvPr id="71" name="Rectangle 70"/>
+              <a:t>A lab member opens a project for any data type and any field, uploads images, video or sensor logs, and gets an automatic diagnosis before choosing what to do next. Weed detection is one project on this platform. The 241 rover, the laser cart and a Unitree humanoid each have their own.</a:t>
+            </a:r>
+          </a:p>
+        </p:txBody>
+      </p:sp>
+      <p:sp>
+        <p:nvSpPr>
+          <p:cNvPr id="76" name="Rectangle 75"/>
           <p:cNvSpPr/>
           <p:nvPr/>
         </p:nvSpPr>
         <p:spPr>
           <a:xfrm>
-            <a:off x="32552640" y="27886660"/>
-            <a:ext cx="10607040" cy="27432"/>
+            <a:off x="731520" y="30632400"/>
+            <a:ext cx="42428160" cy="20116"/>
           </a:xfrm>
           <a:prstGeom prst="rect">
             <a:avLst/>
           </a:prstGeom>
           <a:solidFill>
-            <a:srgbClr val="B5502A"/>
+            <a:srgbClr val="D0D0D0"/>
           </a:solidFill>
           <a:ln>
             <a:noFill/>
@@ -6012,93 +6222,7 @@
       </p:sp>
       <p:sp>
         <p:nvSpPr>
-          <p:cNvPr id="72" name="TextBox 71"/>
-          <p:cNvSpPr txBox="1"/>
-          <p:nvPr/>
-        </p:nvSpPr>
-        <p:spPr>
-          <a:xfrm>
-            <a:off x="32552640" y="28215844"/>
-            <a:ext cx="10607040" cy="365760"/>
-          </a:xfrm>
-          <a:prstGeom prst="rect">
-            <a:avLst/>
-          </a:prstGeom>
-          <a:noFill/>
-        </p:spPr>
-        <p:txBody>
-          <a:bodyPr wrap="square" lIns="0" rIns="0" tIns="0" bIns="0">
-            <a:spAutoFit/>
-          </a:bodyPr>
-          <a:lstStyle/>
-          <a:p>
-            <a:pPr algn="l">
-              <a:lnSpc>
-                <a:spcPct val="122000"/>
-              </a:lnSpc>
-              <a:spcAft>
-                <a:spcPts val="1400"/>
-              </a:spcAft>
-            </a:pPr>
-            <a:r>
-              <a:rPr sz="2000" b="0">
-                <a:solidFill>
-                  <a:srgbClr val="111111"/>
-                </a:solidFill>
-                <a:latin typeface="Arial"/>
-              </a:rPr>
-              <a:t>A lab member opens a project for any data type and any field, uploads images, video or sensor logs, and gets an automatic diagnosis before choosing what to do next. Weed detection is one project on this platform. The 241 rover, the laser cart and a Unitree humanoid each have their own.</a:t>
-            </a:r>
-          </a:p>
-        </p:txBody>
-      </p:sp>
-      <p:sp>
-        <p:nvSpPr>
-          <p:cNvPr id="73" name="Rectangle 72"/>
-          <p:cNvSpPr/>
-          <p:nvPr/>
-        </p:nvSpPr>
-        <p:spPr>
-          <a:xfrm>
-            <a:off x="731520" y="30632400"/>
-            <a:ext cx="42428160" cy="20116"/>
-          </a:xfrm>
-          <a:prstGeom prst="rect">
-            <a:avLst/>
-          </a:prstGeom>
-          <a:solidFill>
-            <a:srgbClr val="D0D0D0"/>
-          </a:solidFill>
-          <a:ln>
-            <a:noFill/>
-          </a:ln>
-          <a:effectLst/>
-        </p:spPr>
-        <p:style>
-          <a:lnRef idx="1">
-            <a:schemeClr val="accent1"/>
-          </a:lnRef>
-          <a:fillRef idx="3">
-            <a:schemeClr val="accent1"/>
-          </a:fillRef>
-          <a:effectRef idx="2">
-            <a:schemeClr val="accent1"/>
-          </a:effectRef>
-          <a:fontRef idx="minor">
-            <a:schemeClr val="lt1"/>
-          </a:fontRef>
-        </p:style>
-        <p:txBody>
-          <a:bodyPr rtlCol="0" anchor="ctr"/>
-          <a:lstStyle/>
-          <a:p>
-            <a:pPr algn="ctr"/>
-          </a:p>
-        </p:txBody>
-      </p:sp>
-      <p:sp>
-        <p:nvSpPr>
-          <p:cNvPr id="74" name="TextBox 73"/>
+          <p:cNvPr id="77" name="TextBox 76"/>
           <p:cNvSpPr txBox="1"/>
           <p:nvPr/>
         </p:nvSpPr>
@@ -6140,7 +6264,7 @@
       </p:sp>
       <p:sp>
         <p:nvSpPr>
-          <p:cNvPr id="75" name="TextBox 74"/>
+          <p:cNvPr id="78" name="TextBox 77"/>
           <p:cNvSpPr txBox="1"/>
           <p:nvPr/>
         </p:nvSpPr>
@@ -6182,7 +6306,7 @@
       </p:sp>
       <p:sp>
         <p:nvSpPr>
-          <p:cNvPr id="76" name="TextBox 75"/>
+          <p:cNvPr id="79" name="TextBox 78"/>
           <p:cNvSpPr txBox="1"/>
           <p:nvPr/>
         </p:nvSpPr>
